--- a/LabProject/PerformanceAnalysis/Mouse_Comparison_Report.pptx
+++ b/LabProject/PerformanceAnalysis/Mouse_Comparison_Report.pptx
@@ -3157,7 +3157,7 @@
         <p:spPr>
           <a:xfrm>
             <a:off x="457200" y="914400"/>
-            <a:ext cx="4114800" cy="4222268"/>
+            <a:ext cx="4114800" cy="4219662"/>
           </a:xfrm>
           <a:prstGeom prst="rect">
             <a:avLst/>
